--- a/courses/learn_legalization/module02-01-greedy-snap/slides.pptx
+++ b/courses/learn_legalization/module02-01-greedy-snap/slides.pptx
@@ -16,6 +16,9 @@
     <p:sldId id="264" r:id="rId16"/>
     <p:sldId id="265" r:id="rId17"/>
     <p:sldId id="266" r:id="rId18"/>
+    <p:sldId id="267" r:id="rId19"/>
+    <p:sldId id="268" r:id="rId20"/>
+    <p:sldId id="269" r:id="rId21"/>
   </p:sldIdLst>
   <p:sldSz cx="12191695" cy="6858000" type="screen4x3"/>
   <p:notesSz cx="6858000" cy="9144000"/>
@@ -582,7 +585,7 @@
           <a:lstStyle/>
           <a:p>
             <a:r>
-              <a:t>Common traps: assuming snap alone legalizes; forgetting site width when checking overlap; ignoring fixed macro D at (8, 4); reporting HPWL without legality; and comparing Abacus and Tetris without naming displacement versus wirelength tradeoffs.</a:t>
+              <a:t>In the browser lab track, open the **greedy-snap** lab from the tools shelf. Open the interactive lab, place or snap cells on the site and row grid—or use an Apply helper—then Check. Reveal golden is study-only. Work the challenges that lock the goldens, then come back to implement the same loop yourself.</a:t>
             </a:r>
           </a:p>
         </p:txBody>
@@ -652,6 +655,146 @@
           <a:lstStyle/>
           <a:p>
             <a:r>
+              <a:t>In the implement track, open this module's EXAMPLES.md Pseudocode section and the course common solvers. Parse `tiny_legal.json`, run the algorithm with deterministic coordinates, and print legality, displacement, and HPWL. Match the browser goldens before you claim the checklist.</a:t>
+            </a:r>
+          </a:p>
+        </p:txBody>
+      </p:sp>
+      <p:sp>
+        <p:nvSpPr>
+          <p:cNvPr id="4" name="Slide Number Placeholder 3"/>
+          <p:cNvSpPr>
+            <a:spLocks noGrp="1"/>
+          </p:cNvSpPr>
+          <p:nvPr>
+            <p:ph type="sldNum" idx="5" sz="quarter"/>
+          </p:nvPr>
+        </p:nvSpPr>
+        <p:spPr/>
+      </p:sp>
+    </p:spTree>
+  </p:cSld>
+  <p:clrMapOvr>
+    <a:masterClrMapping/>
+  </p:clrMapOvr>
+</p:notes>
+</file>
+
+<file path=ppt/notesSlides/notesSlide12.xml><?xml version="1.0" encoding="utf-8"?>
+<p:notes xmlns:a="http://schemas.openxmlformats.org/drawingml/2006/main" xmlns:p="http://schemas.openxmlformats.org/presentationml/2006/main" xmlns:r="http://schemas.openxmlformats.org/officeDocument/2006/relationships">
+  <p:cSld>
+    <p:spTree>
+      <p:nvGrpSpPr>
+        <p:cNvPr id="1" name=""/>
+        <p:cNvGrpSpPr/>
+        <p:nvPr/>
+      </p:nvGrpSpPr>
+      <p:grpSpPr>
+        <a:xfrm>
+          <a:off x="0" y="0"/>
+          <a:ext cx="0" cy="0"/>
+          <a:chOff x="0" y="0"/>
+          <a:chExt cx="0" cy="0"/>
+        </a:xfrm>
+      </p:grpSpPr>
+      <p:sp>
+        <p:nvSpPr>
+          <p:cNvPr id="2" name="Slide Image Placeholder 1"/>
+          <p:cNvSpPr>
+            <a:spLocks noGrp="1"/>
+          </p:cNvSpPr>
+          <p:nvPr>
+            <p:ph type="sldImg" idx="2"/>
+          </p:nvPr>
+        </p:nvSpPr>
+        <p:spPr/>
+      </p:sp>
+      <p:sp>
+        <p:nvSpPr>
+          <p:cNvPr id="3" name="Notes Placeholder 2"/>
+          <p:cNvSpPr>
+            <a:spLocks noGrp="1"/>
+          </p:cNvSpPr>
+          <p:nvPr>
+            <p:ph type="body" idx="3" sz="quarter"/>
+          </p:nvPr>
+        </p:nvSpPr>
+        <p:spPr/>
+        <p:txBody>
+          <a:bodyPr/>
+          <a:lstStyle/>
+          <a:p>
+            <a:r>
+              <a:t>Common traps: assuming snap alone legalizes; forgetting site width when checking overlap; ignoring fixed macro D at (8, 4); reporting HPWL without legality; and comparing Abacus and Tetris without naming displacement versus wirelength tradeoffs.</a:t>
+            </a:r>
+          </a:p>
+        </p:txBody>
+      </p:sp>
+      <p:sp>
+        <p:nvSpPr>
+          <p:cNvPr id="4" name="Slide Number Placeholder 3"/>
+          <p:cNvSpPr>
+            <a:spLocks noGrp="1"/>
+          </p:cNvSpPr>
+          <p:nvPr>
+            <p:ph type="sldNum" idx="5" sz="quarter"/>
+          </p:nvPr>
+        </p:nvSpPr>
+        <p:spPr/>
+      </p:sp>
+    </p:spTree>
+  </p:cSld>
+  <p:clrMapOvr>
+    <a:masterClrMapping/>
+  </p:clrMapOvr>
+</p:notes>
+</file>
+
+<file path=ppt/notesSlides/notesSlide13.xml><?xml version="1.0" encoding="utf-8"?>
+<p:notes xmlns:a="http://schemas.openxmlformats.org/drawingml/2006/main" xmlns:p="http://schemas.openxmlformats.org/presentationml/2006/main" xmlns:r="http://schemas.openxmlformats.org/officeDocument/2006/relationships">
+  <p:cSld>
+    <p:spTree>
+      <p:nvGrpSpPr>
+        <p:cNvPr id="1" name=""/>
+        <p:cNvGrpSpPr/>
+        <p:nvPr/>
+      </p:nvGrpSpPr>
+      <p:grpSpPr>
+        <a:xfrm>
+          <a:off x="0" y="0"/>
+          <a:ext cx="0" cy="0"/>
+          <a:chOff x="0" y="0"/>
+          <a:chExt cx="0" cy="0"/>
+        </a:xfrm>
+      </p:grpSpPr>
+      <p:sp>
+        <p:nvSpPr>
+          <p:cNvPr id="2" name="Slide Image Placeholder 1"/>
+          <p:cNvSpPr>
+            <a:spLocks noGrp="1"/>
+          </p:cNvSpPr>
+          <p:nvPr>
+            <p:ph type="sldImg" idx="2"/>
+          </p:nvPr>
+        </p:nvSpPr>
+        <p:spPr/>
+      </p:sp>
+      <p:sp>
+        <p:nvSpPr>
+          <p:cNvPr id="3" name="Notes Placeholder 2"/>
+          <p:cNvSpPr>
+            <a:spLocks noGrp="1"/>
+          </p:cNvSpPr>
+          <p:nvPr>
+            <p:ph type="body" idx="3" sz="quarter"/>
+          </p:nvPr>
+        </p:nvSpPr>
+        <p:spPr/>
+        <p:txBody>
+          <a:bodyPr/>
+          <a:lstStyle/>
+          <a:p>
+            <a:r>
               <a:t>Complete the checklist for at least one track—preferably both. Implement until your metrics match the starter goldens. When you're ready, take the short quiz, then continue to the next module.</a:t>
             </a:r>
           </a:p>
@@ -725,12 +868,6 @@
               <a:t>Snap quantizes coordinates but does not remove overlap. After snap, A and B still fail with overlap A/B. Teaching point: snap is necessary, not sufficient—you need overlap removal or Abacus packing next.</a:t>
             </a:r>
           </a:p>
-          <a:p/>
-          <a:p>
-            <a:r>
-              <a:t>&lt;!-- algorithm-walkthrough --&gt;</a:t>
-            </a:r>
-          </a:p>
         </p:txBody>
       </p:sp>
       <p:sp>
@@ -798,7 +935,13 @@
           <a:lstStyle/>
           <a:p>
             <a:r>
-              <a:t>After global placement, cells sit at fractional coordinates—A near (3.7, 1.2), B near (4.1, 1.4). Nothing is site-aligned yet; that is the float seed for greedy snap.</a:t>
+              <a:t>Greedy snap is the first written loop after global place. Pseudocode here has one pass: for each movable cell, round x to a site and y to the nearest row. Fixed macros stay put.</a:t>
+            </a:r>
+          </a:p>
+          <a:p/>
+          <a:p>
+            <a:r>
+              <a:t>Open this module's examples file and find the Pseudocode section. That written sketch is what you implement on the implement track and what the browser challenges measure.</a:t>
             </a:r>
           </a:p>
         </p:txBody>
@@ -868,7 +1011,7 @@
           <a:lstStyle/>
           <a:p>
             <a:r>
-              <a:t>Greedy snap rounds x to the nearest site and y to the nearest row. A lands at (4, 2)—same as B. C snaps to (5, 2). D, E, and F snap to their row neighbors.</a:t>
+              <a:t>The important line in the sketch is the note after the loop: snap does not remove overlap. On the float starter, A and B both land at four comma two—so legality still fails until a packer runs.</a:t>
             </a:r>
           </a:p>
         </p:txBody>
@@ -938,7 +1081,7 @@
           <a:lstStyle/>
           <a:p>
             <a:r>
-              <a:t>After snap, A and B still share (4, 2). The legality report again says overlap A/B. Snap alone does not legalize—it only quantizes coordinates.</a:t>
+              <a:t>After global placement, cells sit at fractional coordinates—A near (3.7, 1.2), B near (4.1, 1.4). Nothing is site-aligned yet; that is the float seed for greedy snap.</a:t>
             </a:r>
           </a:p>
         </p:txBody>
@@ -1008,7 +1151,7 @@
           <a:lstStyle/>
           <a:p>
             <a:r>
-              <a:t>Students often assume rounding fixes everything. On this instance greedy snap creates the same middle-row pile as the integer overlap seed. Legalization needs a second phase.</a:t>
+              <a:t>Greedy snap rounds x to the nearest site and y to the nearest row. A lands at (4, 2)—same as B. C snaps to (5, 2). D, E, and F snap to their row neighbors.</a:t>
             </a:r>
           </a:p>
         </p:txBody>
@@ -1078,13 +1221,7 @@
           <a:lstStyle/>
           <a:p>
             <a:r>
-              <a:t>Follow snap with per-row packing or Abacus row assignment. Overlap removal spreads A, B, C along row two; Abacus spreads them across rows with lower displacement.</a:t>
-            </a:r>
-          </a:p>
-          <a:p/>
-          <a:p>
-            <a:r>
-              <a:t>&lt;!-- /algorithm-walkthrough --&gt;</a:t>
+              <a:t>After snap, A and B still share (4, 2). The legality report again says overlap A/B. Snap alone does not legalize—it only quantizes coordinates.</a:t>
             </a:r>
           </a:p>
         </p:txBody>
@@ -1154,7 +1291,7 @@
           <a:lstStyle/>
           <a:p>
             <a:r>
-              <a:t>In the browser lab track, open the **greedy-snap** lab from the tools shelf. Load the overlap or float starter, run the legalizer once, and read legality plus displacement and HPWL when the panel shows them. Work the challenges that lock the goldens, then come back to implement the same loop yourself.</a:t>
+              <a:t>Students often assume rounding fixes everything. On this instance greedy snap creates the same middle-row pile as the integer overlap seed. Legalization needs a second phase.</a:t>
             </a:r>
           </a:p>
         </p:txBody>
@@ -1224,7 +1361,7 @@
           <a:lstStyle/>
           <a:p>
             <a:r>
-              <a:t>In the implement track, open this module's examples and the course `common/` solvers. Parse `tiny_legal.json`, run the algorithm with deterministic coordinates, and print legality, displacement, and HPWL. Match the browser goldens before you claim the checklist.</a:t>
+              <a:t>Follow snap with per-row packing or Abacus row assignment. Overlap removal spreads A, B, C along row two; Abacus spreads them across rows with lower displacement.</a:t>
             </a:r>
           </a:p>
         </p:txBody>
@@ -4382,21 +4519,45 @@
                 </a:solidFill>
                 <a:latin typeface="Calibri"/>
               </a:rPr>
-              <a:t>Pitfalls</a:t>
-            </a:r>
-          </a:p>
-        </p:txBody>
-      </p:sp>
-      <p:sp>
-        <p:nvSpPr>
-          <p:cNvPr id="3" name="TextBox 2"/>
+              <a:t>Next: overlap removal / Abacus</a:t>
+            </a:r>
+          </a:p>
+        </p:txBody>
+      </p:sp>
+      <p:pic>
+        <p:nvPicPr>
+          <p:cNvPr id="3" name="Picture 2" descr="05-next-phase.png"/>
+          <p:cNvPicPr>
+            <a:picLocks noChangeAspect="1"/>
+          </p:cNvPicPr>
+          <p:nvPr/>
+        </p:nvPicPr>
+        <p:blipFill>
+          <a:blip r:embed="rId2"/>
+          <a:stretch>
+            <a:fillRect/>
+          </a:stretch>
+        </p:blipFill>
+        <p:spPr>
+          <a:xfrm>
+            <a:off x="548640" y="1143000"/>
+            <a:ext cx="9404113" cy="4572000"/>
+          </a:xfrm>
+          <a:prstGeom prst="rect">
+            <a:avLst/>
+          </a:prstGeom>
+        </p:spPr>
+      </p:pic>
+      <p:sp>
+        <p:nvSpPr>
+          <p:cNvPr id="4" name="TextBox 3"/>
           <p:cNvSpPr txBox="1"/>
           <p:nvPr/>
         </p:nvSpPr>
         <p:spPr>
           <a:xfrm>
-            <a:off x="548640" y="1234440"/>
-            <a:ext cx="11064240" cy="4937760"/>
+            <a:off x="548640" y="5897880"/>
+            <a:ext cx="11064240" cy="411480"/>
           </a:xfrm>
           <a:prstGeom prst="rect">
             <a:avLst/>
@@ -4409,32 +4570,26 @@
           </a:bodyPr>
           <a:lstStyle/>
           <a:p>
-            <a:pPr lvl="0" marL="457200" indent="-228600">
-              <a:buFont typeface="Calibri"/>
-              <a:spcAft>
-                <a:spcPts val="1000"/>
-              </a:spcAft>
-              <a:buSzPct val="100000"/>
-              <a:buChar char="•"/>
+            <a:pPr>
               <a:lnSpc>
                 <a:spcPts val="2200"/>
               </a:lnSpc>
             </a:pPr>
             <a:r>
-              <a:rPr sz="2000" b="0">
+              <a:rPr sz="1200" b="0">
                 <a:solidFill>
                   <a:srgbClr val="333333"/>
                 </a:solidFill>
                 <a:latin typeface="Calibri"/>
               </a:rPr>
-              <a:t>Common traps</a:t>
-            </a:r>
-          </a:p>
-        </p:txBody>
-      </p:sp>
-      <p:sp>
-        <p:nvSpPr>
-          <p:cNvPr id="4" name="TextBox 3"/>
+              <a:t>Next: overlap removal / Abacus</a:t>
+            </a:r>
+          </a:p>
+        </p:txBody>
+      </p:sp>
+      <p:sp>
+        <p:nvSpPr>
+          <p:cNvPr id="5" name="TextBox 4"/>
           <p:cNvSpPr txBox="1"/>
           <p:nvPr/>
         </p:nvSpPr>
@@ -4523,6 +4678,557 @@
                 </a:solidFill>
                 <a:latin typeface="Calibri"/>
               </a:rPr>
+              <a:t>Browser lab track</a:t>
+            </a:r>
+          </a:p>
+        </p:txBody>
+      </p:sp>
+      <p:sp>
+        <p:nvSpPr>
+          <p:cNvPr id="3" name="TextBox 2"/>
+          <p:cNvSpPr txBox="1"/>
+          <p:nvPr/>
+        </p:nvSpPr>
+        <p:spPr>
+          <a:xfrm>
+            <a:off x="548640" y="1234440"/>
+            <a:ext cx="11064240" cy="4937760"/>
+          </a:xfrm>
+          <a:prstGeom prst="rect">
+            <a:avLst/>
+          </a:prstGeom>
+          <a:noFill/>
+        </p:spPr>
+        <p:txBody>
+          <a:bodyPr wrap="square">
+            <a:noAutofit/>
+          </a:bodyPr>
+          <a:lstStyle/>
+          <a:p>
+            <a:pPr lvl="0" marL="457200" indent="-228600">
+              <a:buFont typeface="Calibri"/>
+              <a:spcAft>
+                <a:spcPts val="1000"/>
+              </a:spcAft>
+              <a:buSzPct val="100000"/>
+              <a:buChar char="•"/>
+              <a:lnSpc>
+                <a:spcPts val="2200"/>
+              </a:lnSpc>
+            </a:pPr>
+            <a:r>
+              <a:rPr sz="2000" b="0">
+                <a:solidFill>
+                  <a:srgbClr val="333333"/>
+                </a:solidFill>
+                <a:latin typeface="Calibri"/>
+              </a:rPr>
+              <a:t>In the browser lab track, open the </a:t>
+            </a:r>
+            <a:r>
+              <a:rPr sz="2000" b="1">
+                <a:solidFill>
+                  <a:srgbClr val="333333"/>
+                </a:solidFill>
+                <a:latin typeface="Calibri"/>
+              </a:rPr>
+              <a:t>greedy-snap</a:t>
+            </a:r>
+            <a:r>
+              <a:rPr sz="2000" b="0">
+                <a:solidFill>
+                  <a:srgbClr val="333333"/>
+                </a:solidFill>
+                <a:latin typeface="Calibri"/>
+              </a:rPr>
+              <a:t> lab from the tools shelf</a:t>
+            </a:r>
+          </a:p>
+          <a:p>
+            <a:pPr lvl="0" marL="457200" indent="-228600">
+              <a:buFont typeface="Calibri"/>
+              <a:spcAft>
+                <a:spcPts val="1000"/>
+              </a:spcAft>
+              <a:buSzPct val="100000"/>
+              <a:buChar char="•"/>
+              <a:lnSpc>
+                <a:spcPts val="2200"/>
+              </a:lnSpc>
+            </a:pPr>
+            <a:r>
+              <a:rPr sz="2000" b="0">
+                <a:solidFill>
+                  <a:srgbClr val="333333"/>
+                </a:solidFill>
+                <a:latin typeface="Calibri"/>
+              </a:rPr>
+              <a:t>Open the interactive lab</a:t>
+            </a:r>
+          </a:p>
+          <a:p>
+            <a:pPr lvl="0" marL="457200" indent="-228600">
+              <a:buFont typeface="Calibri"/>
+              <a:spcAft>
+                <a:spcPts val="1000"/>
+              </a:spcAft>
+              <a:buSzPct val="100000"/>
+              <a:buChar char="•"/>
+              <a:lnSpc>
+                <a:spcPts val="2200"/>
+              </a:lnSpc>
+            </a:pPr>
+            <a:r>
+              <a:rPr sz="2000" b="0">
+                <a:solidFill>
+                  <a:srgbClr val="333333"/>
+                </a:solidFill>
+                <a:latin typeface="Calibri"/>
+              </a:rPr>
+              <a:t>Reveal golden is study-only</a:t>
+            </a:r>
+          </a:p>
+          <a:p>
+            <a:pPr lvl="0" marL="457200" indent="-228600">
+              <a:buFont typeface="Calibri"/>
+              <a:spcAft>
+                <a:spcPts val="1000"/>
+              </a:spcAft>
+              <a:buSzPct val="100000"/>
+              <a:buChar char="•"/>
+              <a:lnSpc>
+                <a:spcPts val="2200"/>
+              </a:lnSpc>
+            </a:pPr>
+            <a:r>
+              <a:rPr sz="2000" b="0">
+                <a:solidFill>
+                  <a:srgbClr val="333333"/>
+                </a:solidFill>
+                <a:latin typeface="Calibri"/>
+              </a:rPr>
+              <a:t>Work the challenges that lock the goldens</a:t>
+            </a:r>
+          </a:p>
+        </p:txBody>
+      </p:sp>
+      <p:sp>
+        <p:nvSpPr>
+          <p:cNvPr id="4" name="TextBox 3"/>
+          <p:cNvSpPr txBox="1"/>
+          <p:nvPr/>
+        </p:nvSpPr>
+        <p:spPr>
+          <a:xfrm>
+            <a:off x="548640" y="6355080"/>
+            <a:ext cx="11064240" cy="320040"/>
+          </a:xfrm>
+          <a:prstGeom prst="rect">
+            <a:avLst/>
+          </a:prstGeom>
+          <a:noFill/>
+        </p:spPr>
+        <p:txBody>
+          <a:bodyPr wrap="square">
+            <a:noAutofit/>
+          </a:bodyPr>
+          <a:lstStyle/>
+          <a:p>
+            <a:pPr algn="r">
+              <a:lnSpc>
+                <a:spcPts val="2200"/>
+              </a:lnSpc>
+              <a:defRPr sz="1000" b="0">
+                <a:solidFill>
+                  <a:srgbClr val="666666"/>
+                </a:solidFill>
+                <a:latin typeface="Calibri"/>
+              </a:defRPr>
+            </a:pPr>
+            <a:r>
+              <a:t>learn_legalization — 01 greedy snap</a:t>
+            </a:r>
+          </a:p>
+        </p:txBody>
+      </p:sp>
+    </p:spTree>
+  </p:cSld>
+  <p:clrMapOvr>
+    <a:masterClrMapping/>
+  </p:clrMapOvr>
+</p:sld>
+</file>
+
+<file path=ppt/slides/slide12.xml><?xml version="1.0" encoding="utf-8"?>
+<p:sld xmlns:a="http://schemas.openxmlformats.org/drawingml/2006/main" xmlns:p="http://schemas.openxmlformats.org/presentationml/2006/main" xmlns:r="http://schemas.openxmlformats.org/officeDocument/2006/relationships">
+  <p:cSld>
+    <p:spTree>
+      <p:nvGrpSpPr>
+        <p:cNvPr id="1" name=""/>
+        <p:cNvGrpSpPr/>
+        <p:nvPr/>
+      </p:nvGrpSpPr>
+      <p:grpSpPr/>
+      <p:sp>
+        <p:nvSpPr>
+          <p:cNvPr id="2" name="TextBox 1"/>
+          <p:cNvSpPr txBox="1"/>
+          <p:nvPr/>
+        </p:nvSpPr>
+        <p:spPr>
+          <a:xfrm>
+            <a:off x="548640" y="411480"/>
+            <a:ext cx="11064240" cy="777240"/>
+          </a:xfrm>
+          <a:prstGeom prst="rect">
+            <a:avLst/>
+          </a:prstGeom>
+          <a:noFill/>
+        </p:spPr>
+        <p:txBody>
+          <a:bodyPr wrap="square">
+            <a:noAutofit/>
+          </a:bodyPr>
+          <a:lstStyle/>
+          <a:p>
+            <a:pPr>
+              <a:lnSpc>
+                <a:spcPts val="2200"/>
+              </a:lnSpc>
+            </a:pPr>
+            <a:r>
+              <a:rPr sz="2800" b="1">
+                <a:solidFill>
+                  <a:srgbClr val="1A1A2E"/>
+                </a:solidFill>
+                <a:latin typeface="Calibri"/>
+              </a:rPr>
+              <a:t>Implement track</a:t>
+            </a:r>
+          </a:p>
+        </p:txBody>
+      </p:sp>
+      <p:sp>
+        <p:nvSpPr>
+          <p:cNvPr id="3" name="TextBox 2"/>
+          <p:cNvSpPr txBox="1"/>
+          <p:nvPr/>
+        </p:nvSpPr>
+        <p:spPr>
+          <a:xfrm>
+            <a:off x="548640" y="1234440"/>
+            <a:ext cx="11064240" cy="4937760"/>
+          </a:xfrm>
+          <a:prstGeom prst="rect">
+            <a:avLst/>
+          </a:prstGeom>
+          <a:noFill/>
+        </p:spPr>
+        <p:txBody>
+          <a:bodyPr wrap="square">
+            <a:noAutofit/>
+          </a:bodyPr>
+          <a:lstStyle/>
+          <a:p>
+            <a:pPr lvl="0" marL="457200" indent="-228600">
+              <a:buFont typeface="Calibri"/>
+              <a:spcAft>
+                <a:spcPts val="1000"/>
+              </a:spcAft>
+              <a:buSzPct val="100000"/>
+              <a:buChar char="•"/>
+              <a:lnSpc>
+                <a:spcPts val="2200"/>
+              </a:lnSpc>
+            </a:pPr>
+            <a:r>
+              <a:rPr sz="2000" b="0">
+                <a:solidFill>
+                  <a:srgbClr val="333333"/>
+                </a:solidFill>
+                <a:latin typeface="Calibri"/>
+              </a:rPr>
+              <a:t>In the implement track</a:t>
+            </a:r>
+          </a:p>
+          <a:p>
+            <a:pPr lvl="0" marL="457200" indent="-228600">
+              <a:buFont typeface="Calibri"/>
+              <a:spcAft>
+                <a:spcPts val="1000"/>
+              </a:spcAft>
+              <a:buSzPct val="100000"/>
+              <a:buChar char="•"/>
+              <a:lnSpc>
+                <a:spcPts val="2200"/>
+              </a:lnSpc>
+            </a:pPr>
+            <a:r>
+              <a:rPr sz="2000" b="0">
+                <a:solidFill>
+                  <a:srgbClr val="333333"/>
+                </a:solidFill>
+                <a:latin typeface="Calibri"/>
+              </a:rPr>
+              <a:t>Parse `tiny_legal.json`, run the algorithm with deterministic coordinates</a:t>
+            </a:r>
+          </a:p>
+          <a:p>
+            <a:pPr lvl="0" marL="457200" indent="-228600">
+              <a:buFont typeface="Calibri"/>
+              <a:spcAft>
+                <a:spcPts val="1000"/>
+              </a:spcAft>
+              <a:buSzPct val="100000"/>
+              <a:buChar char="•"/>
+              <a:lnSpc>
+                <a:spcPts val="2200"/>
+              </a:lnSpc>
+            </a:pPr>
+            <a:r>
+              <a:rPr sz="2000" b="0">
+                <a:solidFill>
+                  <a:srgbClr val="333333"/>
+                </a:solidFill>
+                <a:latin typeface="Calibri"/>
+              </a:rPr>
+              <a:t>Match the browser goldens before you claim the checklist</a:t>
+            </a:r>
+          </a:p>
+        </p:txBody>
+      </p:sp>
+      <p:sp>
+        <p:nvSpPr>
+          <p:cNvPr id="4" name="TextBox 3"/>
+          <p:cNvSpPr txBox="1"/>
+          <p:nvPr/>
+        </p:nvSpPr>
+        <p:spPr>
+          <a:xfrm>
+            <a:off x="548640" y="6355080"/>
+            <a:ext cx="11064240" cy="320040"/>
+          </a:xfrm>
+          <a:prstGeom prst="rect">
+            <a:avLst/>
+          </a:prstGeom>
+          <a:noFill/>
+        </p:spPr>
+        <p:txBody>
+          <a:bodyPr wrap="square">
+            <a:noAutofit/>
+          </a:bodyPr>
+          <a:lstStyle/>
+          <a:p>
+            <a:pPr algn="r">
+              <a:lnSpc>
+                <a:spcPts val="2200"/>
+              </a:lnSpc>
+              <a:defRPr sz="1000" b="0">
+                <a:solidFill>
+                  <a:srgbClr val="666666"/>
+                </a:solidFill>
+                <a:latin typeface="Calibri"/>
+              </a:defRPr>
+            </a:pPr>
+            <a:r>
+              <a:t>learn_legalization — 01 greedy snap</a:t>
+            </a:r>
+          </a:p>
+        </p:txBody>
+      </p:sp>
+    </p:spTree>
+  </p:cSld>
+  <p:clrMapOvr>
+    <a:masterClrMapping/>
+  </p:clrMapOvr>
+</p:sld>
+</file>
+
+<file path=ppt/slides/slide13.xml><?xml version="1.0" encoding="utf-8"?>
+<p:sld xmlns:a="http://schemas.openxmlformats.org/drawingml/2006/main" xmlns:p="http://schemas.openxmlformats.org/presentationml/2006/main" xmlns:r="http://schemas.openxmlformats.org/officeDocument/2006/relationships">
+  <p:cSld>
+    <p:spTree>
+      <p:nvGrpSpPr>
+        <p:cNvPr id="1" name=""/>
+        <p:cNvGrpSpPr/>
+        <p:nvPr/>
+      </p:nvGrpSpPr>
+      <p:grpSpPr/>
+      <p:sp>
+        <p:nvSpPr>
+          <p:cNvPr id="2" name="TextBox 1"/>
+          <p:cNvSpPr txBox="1"/>
+          <p:nvPr/>
+        </p:nvSpPr>
+        <p:spPr>
+          <a:xfrm>
+            <a:off x="548640" y="411480"/>
+            <a:ext cx="11064240" cy="777240"/>
+          </a:xfrm>
+          <a:prstGeom prst="rect">
+            <a:avLst/>
+          </a:prstGeom>
+          <a:noFill/>
+        </p:spPr>
+        <p:txBody>
+          <a:bodyPr wrap="square">
+            <a:noAutofit/>
+          </a:bodyPr>
+          <a:lstStyle/>
+          <a:p>
+            <a:pPr>
+              <a:lnSpc>
+                <a:spcPts val="2200"/>
+              </a:lnSpc>
+            </a:pPr>
+            <a:r>
+              <a:rPr sz="2800" b="1">
+                <a:solidFill>
+                  <a:srgbClr val="1A1A2E"/>
+                </a:solidFill>
+                <a:latin typeface="Calibri"/>
+              </a:rPr>
+              <a:t>Pitfalls</a:t>
+            </a:r>
+          </a:p>
+        </p:txBody>
+      </p:sp>
+      <p:sp>
+        <p:nvSpPr>
+          <p:cNvPr id="3" name="TextBox 2"/>
+          <p:cNvSpPr txBox="1"/>
+          <p:nvPr/>
+        </p:nvSpPr>
+        <p:spPr>
+          <a:xfrm>
+            <a:off x="548640" y="1234440"/>
+            <a:ext cx="11064240" cy="4937760"/>
+          </a:xfrm>
+          <a:prstGeom prst="rect">
+            <a:avLst/>
+          </a:prstGeom>
+          <a:noFill/>
+        </p:spPr>
+        <p:txBody>
+          <a:bodyPr wrap="square">
+            <a:noAutofit/>
+          </a:bodyPr>
+          <a:lstStyle/>
+          <a:p>
+            <a:pPr lvl="0" marL="457200" indent="-228600">
+              <a:buFont typeface="Calibri"/>
+              <a:spcAft>
+                <a:spcPts val="1000"/>
+              </a:spcAft>
+              <a:buSzPct val="100000"/>
+              <a:buChar char="•"/>
+              <a:lnSpc>
+                <a:spcPts val="2200"/>
+              </a:lnSpc>
+            </a:pPr>
+            <a:r>
+              <a:rPr sz="2000" b="0">
+                <a:solidFill>
+                  <a:srgbClr val="333333"/>
+                </a:solidFill>
+                <a:latin typeface="Calibri"/>
+              </a:rPr>
+              <a:t>Common traps</a:t>
+            </a:r>
+          </a:p>
+        </p:txBody>
+      </p:sp>
+      <p:sp>
+        <p:nvSpPr>
+          <p:cNvPr id="4" name="TextBox 3"/>
+          <p:cNvSpPr txBox="1"/>
+          <p:nvPr/>
+        </p:nvSpPr>
+        <p:spPr>
+          <a:xfrm>
+            <a:off x="548640" y="6355080"/>
+            <a:ext cx="11064240" cy="320040"/>
+          </a:xfrm>
+          <a:prstGeom prst="rect">
+            <a:avLst/>
+          </a:prstGeom>
+          <a:noFill/>
+        </p:spPr>
+        <p:txBody>
+          <a:bodyPr wrap="square">
+            <a:noAutofit/>
+          </a:bodyPr>
+          <a:lstStyle/>
+          <a:p>
+            <a:pPr algn="r">
+              <a:lnSpc>
+                <a:spcPts val="2200"/>
+              </a:lnSpc>
+              <a:defRPr sz="1000" b="0">
+                <a:solidFill>
+                  <a:srgbClr val="666666"/>
+                </a:solidFill>
+                <a:latin typeface="Calibri"/>
+              </a:defRPr>
+            </a:pPr>
+            <a:r>
+              <a:t>learn_legalization — 01 greedy snap</a:t>
+            </a:r>
+          </a:p>
+        </p:txBody>
+      </p:sp>
+    </p:spTree>
+  </p:cSld>
+  <p:clrMapOvr>
+    <a:masterClrMapping/>
+  </p:clrMapOvr>
+</p:sld>
+</file>
+
+<file path=ppt/slides/slide14.xml><?xml version="1.0" encoding="utf-8"?>
+<p:sld xmlns:a="http://schemas.openxmlformats.org/drawingml/2006/main" xmlns:p="http://schemas.openxmlformats.org/presentationml/2006/main" xmlns:r="http://schemas.openxmlformats.org/officeDocument/2006/relationships">
+  <p:cSld>
+    <p:spTree>
+      <p:nvGrpSpPr>
+        <p:cNvPr id="1" name=""/>
+        <p:cNvGrpSpPr/>
+        <p:nvPr/>
+      </p:nvGrpSpPr>
+      <p:grpSpPr/>
+      <p:sp>
+        <p:nvSpPr>
+          <p:cNvPr id="2" name="TextBox 1"/>
+          <p:cNvSpPr txBox="1"/>
+          <p:nvPr/>
+        </p:nvSpPr>
+        <p:spPr>
+          <a:xfrm>
+            <a:off x="548640" y="411480"/>
+            <a:ext cx="11064240" cy="777240"/>
+          </a:xfrm>
+          <a:prstGeom prst="rect">
+            <a:avLst/>
+          </a:prstGeom>
+          <a:noFill/>
+        </p:spPr>
+        <p:txBody>
+          <a:bodyPr wrap="square">
+            <a:noAutofit/>
+          </a:bodyPr>
+          <a:lstStyle/>
+          <a:p>
+            <a:pPr>
+              <a:lnSpc>
+                <a:spcPts val="2200"/>
+              </a:lnSpc>
+            </a:pPr>
+            <a:r>
+              <a:rPr sz="2800" b="1">
+                <a:solidFill>
+                  <a:srgbClr val="1A1A2E"/>
+                </a:solidFill>
+                <a:latin typeface="Calibri"/>
+              </a:rPr>
               <a:t>Your turn</a:t>
             </a:r>
           </a:p>
@@ -4800,6 +5506,125 @@
               <a:t>Teaching point</a:t>
             </a:r>
           </a:p>
+        </p:txBody>
+      </p:sp>
+      <p:sp>
+        <p:nvSpPr>
+          <p:cNvPr id="4" name="TextBox 3"/>
+          <p:cNvSpPr txBox="1"/>
+          <p:nvPr/>
+        </p:nvSpPr>
+        <p:spPr>
+          <a:xfrm>
+            <a:off x="548640" y="6355080"/>
+            <a:ext cx="11064240" cy="320040"/>
+          </a:xfrm>
+          <a:prstGeom prst="rect">
+            <a:avLst/>
+          </a:prstGeom>
+          <a:noFill/>
+        </p:spPr>
+        <p:txBody>
+          <a:bodyPr wrap="square">
+            <a:noAutofit/>
+          </a:bodyPr>
+          <a:lstStyle/>
+          <a:p>
+            <a:pPr algn="r">
+              <a:lnSpc>
+                <a:spcPts val="2200"/>
+              </a:lnSpc>
+              <a:defRPr sz="1000" b="0">
+                <a:solidFill>
+                  <a:srgbClr val="666666"/>
+                </a:solidFill>
+                <a:latin typeface="Calibri"/>
+              </a:defRPr>
+            </a:pPr>
+            <a:r>
+              <a:t>learn_legalization — 01 greedy snap</a:t>
+            </a:r>
+          </a:p>
+        </p:txBody>
+      </p:sp>
+    </p:spTree>
+  </p:cSld>
+  <p:clrMapOvr>
+    <a:masterClrMapping/>
+  </p:clrMapOvr>
+</p:sld>
+</file>
+
+<file path=ppt/slides/slide3.xml><?xml version="1.0" encoding="utf-8"?>
+<p:sld xmlns:a="http://schemas.openxmlformats.org/drawingml/2006/main" xmlns:p="http://schemas.openxmlformats.org/presentationml/2006/main" xmlns:r="http://schemas.openxmlformats.org/officeDocument/2006/relationships">
+  <p:cSld>
+    <p:spTree>
+      <p:nvGrpSpPr>
+        <p:cNvPr id="1" name=""/>
+        <p:cNvGrpSpPr/>
+        <p:nvPr/>
+      </p:nvGrpSpPr>
+      <p:grpSpPr/>
+      <p:sp>
+        <p:nvSpPr>
+          <p:cNvPr id="2" name="TextBox 1"/>
+          <p:cNvSpPr txBox="1"/>
+          <p:nvPr/>
+        </p:nvSpPr>
+        <p:spPr>
+          <a:xfrm>
+            <a:off x="548640" y="411480"/>
+            <a:ext cx="11064240" cy="777240"/>
+          </a:xfrm>
+          <a:prstGeom prst="rect">
+            <a:avLst/>
+          </a:prstGeom>
+          <a:noFill/>
+        </p:spPr>
+        <p:txBody>
+          <a:bodyPr wrap="square">
+            <a:noAutofit/>
+          </a:bodyPr>
+          <a:lstStyle/>
+          <a:p>
+            <a:pPr>
+              <a:lnSpc>
+                <a:spcPts val="2200"/>
+              </a:lnSpc>
+            </a:pPr>
+            <a:r>
+              <a:rPr sz="2800" b="1">
+                <a:solidFill>
+                  <a:srgbClr val="1A1A2E"/>
+                </a:solidFill>
+                <a:latin typeface="Calibri"/>
+              </a:rPr>
+              <a:t>Pseudocode</a:t>
+            </a:r>
+          </a:p>
+        </p:txBody>
+      </p:sp>
+      <p:sp>
+        <p:nvSpPr>
+          <p:cNvPr id="3" name="TextBox 2"/>
+          <p:cNvSpPr txBox="1"/>
+          <p:nvPr/>
+        </p:nvSpPr>
+        <p:spPr>
+          <a:xfrm>
+            <a:off x="548640" y="1234440"/>
+            <a:ext cx="11064240" cy="4937760"/>
+          </a:xfrm>
+          <a:prstGeom prst="rect">
+            <a:avLst/>
+          </a:prstGeom>
+          <a:noFill/>
+        </p:spPr>
+        <p:txBody>
+          <a:bodyPr wrap="square">
+            <a:noAutofit/>
+          </a:bodyPr>
+          <a:lstStyle/>
           <a:p>
             <a:pPr lvl="0" marL="457200" indent="-228600">
               <a:buFont typeface="Calibri"/>
@@ -4819,7 +5644,95 @@
                 </a:solidFill>
                 <a:latin typeface="Calibri"/>
               </a:rPr>
-              <a:t>&lt;!-- algorithm-walkthrough --&gt;</a:t>
+              <a:t>Greedy snap is the first written loop after global place</a:t>
+            </a:r>
+          </a:p>
+          <a:p>
+            <a:pPr lvl="0" marL="457200" indent="-228600">
+              <a:buFont typeface="Calibri"/>
+              <a:spcAft>
+                <a:spcPts val="1000"/>
+              </a:spcAft>
+              <a:buSzPct val="100000"/>
+              <a:buChar char="•"/>
+              <a:lnSpc>
+                <a:spcPts val="2200"/>
+              </a:lnSpc>
+            </a:pPr>
+            <a:r>
+              <a:rPr sz="2000" b="0">
+                <a:solidFill>
+                  <a:srgbClr val="333333"/>
+                </a:solidFill>
+                <a:latin typeface="Calibri"/>
+              </a:rPr>
+              <a:t>Pseudocode here has one pass</a:t>
+            </a:r>
+          </a:p>
+          <a:p>
+            <a:pPr lvl="0" marL="457200" indent="-228600">
+              <a:buFont typeface="Calibri"/>
+              <a:spcAft>
+                <a:spcPts val="1000"/>
+              </a:spcAft>
+              <a:buSzPct val="100000"/>
+              <a:buChar char="•"/>
+              <a:lnSpc>
+                <a:spcPts val="2200"/>
+              </a:lnSpc>
+            </a:pPr>
+            <a:r>
+              <a:rPr sz="2000" b="0">
+                <a:solidFill>
+                  <a:srgbClr val="333333"/>
+                </a:solidFill>
+                <a:latin typeface="Calibri"/>
+              </a:rPr>
+              <a:t>Fixed macros stay put</a:t>
+            </a:r>
+          </a:p>
+          <a:p>
+            <a:pPr lvl="0" marL="457200" indent="-228600">
+              <a:buFont typeface="Calibri"/>
+              <a:spcAft>
+                <a:spcPts val="1000"/>
+              </a:spcAft>
+              <a:buSzPct val="100000"/>
+              <a:buChar char="•"/>
+              <a:lnSpc>
+                <a:spcPts val="2200"/>
+              </a:lnSpc>
+            </a:pPr>
+            <a:r>
+              <a:rPr sz="2000" b="0">
+                <a:solidFill>
+                  <a:srgbClr val="333333"/>
+                </a:solidFill>
+                <a:latin typeface="Calibri"/>
+              </a:rPr>
+              <a:t>Open this module's examples file and find the Pseudocode section</a:t>
+            </a:r>
+          </a:p>
+          <a:p>
+            <a:pPr lvl="0" marL="457200" indent="-228600">
+              <a:buFont typeface="Calibri"/>
+              <a:spcAft>
+                <a:spcPts val="1000"/>
+              </a:spcAft>
+              <a:buSzPct val="100000"/>
+              <a:buChar char="•"/>
+              <a:lnSpc>
+                <a:spcPts val="2200"/>
+              </a:lnSpc>
+            </a:pPr>
+            <a:r>
+              <a:rPr sz="2000" b="0">
+                <a:solidFill>
+                  <a:srgbClr val="333333"/>
+                </a:solidFill>
+                <a:latin typeface="Calibri"/>
+              </a:rPr>
+              <a:t>That written sketch is what you implement on the implement track and what the browser</a:t>
             </a:r>
           </a:p>
         </p:txBody>
@@ -4871,7 +5784,443 @@
 </p:sld>
 </file>
 
-<file path=ppt/slides/slide3.xml><?xml version="1.0" encoding="utf-8"?>
+<file path=ppt/slides/slide4.xml><?xml version="1.0" encoding="utf-8"?>
+<p:sld xmlns:a="http://schemas.openxmlformats.org/drawingml/2006/main" xmlns:p="http://schemas.openxmlformats.org/presentationml/2006/main" xmlns:r="http://schemas.openxmlformats.org/officeDocument/2006/relationships">
+  <p:cSld>
+    <p:spTree>
+      <p:nvGrpSpPr>
+        <p:cNvPr id="1" name=""/>
+        <p:cNvGrpSpPr/>
+        <p:nvPr/>
+      </p:nvGrpSpPr>
+      <p:grpSpPr/>
+      <p:sp>
+        <p:nvSpPr>
+          <p:cNvPr id="2" name="TextBox 1"/>
+          <p:cNvSpPr txBox="1"/>
+          <p:nvPr/>
+        </p:nvSpPr>
+        <p:spPr>
+          <a:xfrm>
+            <a:off x="548640" y="411480"/>
+            <a:ext cx="11064240" cy="777240"/>
+          </a:xfrm>
+          <a:prstGeom prst="rect">
+            <a:avLst/>
+          </a:prstGeom>
+          <a:noFill/>
+        </p:spPr>
+        <p:txBody>
+          <a:bodyPr wrap="square">
+            <a:noAutofit/>
+          </a:bodyPr>
+          <a:lstStyle/>
+          <a:p>
+            <a:pPr>
+              <a:lnSpc>
+                <a:spcPts val="2200"/>
+              </a:lnSpc>
+            </a:pPr>
+            <a:r>
+              <a:rPr sz="2800" b="1">
+                <a:solidFill>
+                  <a:srgbClr val="1A1A2E"/>
+                </a:solidFill>
+                <a:latin typeface="Calibri"/>
+              </a:rPr>
+              <a:t>Algorithm sketch</a:t>
+            </a:r>
+          </a:p>
+        </p:txBody>
+      </p:sp>
+      <p:sp>
+        <p:nvSpPr>
+          <p:cNvPr id="3" name="TextBox 2"/>
+          <p:cNvSpPr txBox="1"/>
+          <p:nvPr/>
+        </p:nvSpPr>
+        <p:spPr>
+          <a:xfrm>
+            <a:off x="548640" y="1234440"/>
+            <a:ext cx="11064240" cy="4937760"/>
+          </a:xfrm>
+          <a:prstGeom prst="rect">
+            <a:avLst/>
+          </a:prstGeom>
+          <a:noFill/>
+        </p:spPr>
+        <p:txBody>
+          <a:bodyPr wrap="square">
+            <a:noAutofit/>
+          </a:bodyPr>
+          <a:lstStyle/>
+          <a:p>
+            <a:pPr lvl="0" marL="457200" indent="-228600">
+              <a:buFont typeface="Calibri"/>
+              <a:spcAft>
+                <a:spcPts val="1000"/>
+              </a:spcAft>
+              <a:buSzPct val="100000"/>
+              <a:buChar char="•"/>
+              <a:lnSpc>
+                <a:spcPts val="2200"/>
+              </a:lnSpc>
+            </a:pPr>
+            <a:r>
+              <a:rPr sz="2000" b="0">
+                <a:solidFill>
+                  <a:srgbClr val="333333"/>
+                </a:solidFill>
+                <a:latin typeface="Calibri"/>
+              </a:rPr>
+              <a:t>The important line in the sketch is the note after the loop: snap does not remove overlap</a:t>
+            </a:r>
+          </a:p>
+          <a:p>
+            <a:pPr lvl="0" marL="457200" indent="-228600">
+              <a:buFont typeface="Calibri"/>
+              <a:spcAft>
+                <a:spcPts val="1000"/>
+              </a:spcAft>
+              <a:buSzPct val="100000"/>
+              <a:buChar char="•"/>
+              <a:lnSpc>
+                <a:spcPts val="2200"/>
+              </a:lnSpc>
+            </a:pPr>
+            <a:r>
+              <a:rPr sz="2000" b="0">
+                <a:solidFill>
+                  <a:srgbClr val="333333"/>
+                </a:solidFill>
+                <a:latin typeface="Calibri"/>
+              </a:rPr>
+              <a:t>On the float starter</a:t>
+            </a:r>
+          </a:p>
+        </p:txBody>
+      </p:sp>
+      <p:sp>
+        <p:nvSpPr>
+          <p:cNvPr id="4" name="TextBox 3"/>
+          <p:cNvSpPr txBox="1"/>
+          <p:nvPr/>
+        </p:nvSpPr>
+        <p:spPr>
+          <a:xfrm>
+            <a:off x="548640" y="6355080"/>
+            <a:ext cx="11064240" cy="320040"/>
+          </a:xfrm>
+          <a:prstGeom prst="rect">
+            <a:avLst/>
+          </a:prstGeom>
+          <a:noFill/>
+        </p:spPr>
+        <p:txBody>
+          <a:bodyPr wrap="square">
+            <a:noAutofit/>
+          </a:bodyPr>
+          <a:lstStyle/>
+          <a:p>
+            <a:pPr algn="r">
+              <a:lnSpc>
+                <a:spcPts val="2200"/>
+              </a:lnSpc>
+              <a:defRPr sz="1000" b="0">
+                <a:solidFill>
+                  <a:srgbClr val="666666"/>
+                </a:solidFill>
+                <a:latin typeface="Calibri"/>
+              </a:defRPr>
+            </a:pPr>
+            <a:r>
+              <a:t>learn_legalization — 01 greedy snap</a:t>
+            </a:r>
+          </a:p>
+        </p:txBody>
+      </p:sp>
+    </p:spTree>
+  </p:cSld>
+  <p:clrMapOvr>
+    <a:masterClrMapping/>
+  </p:clrMapOvr>
+</p:sld>
+</file>
+
+<file path=ppt/slides/slide5.xml><?xml version="1.0" encoding="utf-8"?>
+<p:sld xmlns:a="http://schemas.openxmlformats.org/drawingml/2006/main" xmlns:p="http://schemas.openxmlformats.org/presentationml/2006/main" xmlns:r="http://schemas.openxmlformats.org/officeDocument/2006/relationships">
+  <p:cSld>
+    <p:spTree>
+      <p:nvGrpSpPr>
+        <p:cNvPr id="1" name=""/>
+        <p:cNvGrpSpPr/>
+        <p:nvPr/>
+      </p:nvGrpSpPr>
+      <p:grpSpPr/>
+      <p:sp>
+        <p:nvSpPr>
+          <p:cNvPr id="2" name="TextBox 1"/>
+          <p:cNvSpPr txBox="1"/>
+          <p:nvPr/>
+        </p:nvSpPr>
+        <p:spPr>
+          <a:xfrm>
+            <a:off x="548640" y="411480"/>
+            <a:ext cx="11064240" cy="777240"/>
+          </a:xfrm>
+          <a:prstGeom prst="rect">
+            <a:avLst/>
+          </a:prstGeom>
+          <a:noFill/>
+        </p:spPr>
+        <p:txBody>
+          <a:bodyPr wrap="square">
+            <a:noAutofit/>
+          </a:bodyPr>
+          <a:lstStyle/>
+          <a:p>
+            <a:pPr>
+              <a:lnSpc>
+                <a:spcPts val="2200"/>
+              </a:lnSpc>
+            </a:pPr>
+            <a:r>
+              <a:rPr sz="2800" b="1">
+                <a:solidFill>
+                  <a:srgbClr val="1A1A2E"/>
+                </a:solidFill>
+                <a:latin typeface="Calibri"/>
+              </a:rPr>
+              <a:t>Algorithm sketch — try these</a:t>
+            </a:r>
+          </a:p>
+        </p:txBody>
+      </p:sp>
+      <p:sp>
+        <p:nvSpPr>
+          <p:cNvPr id="3" name="TextBox 2"/>
+          <p:cNvSpPr txBox="1"/>
+          <p:nvPr/>
+        </p:nvSpPr>
+        <p:spPr>
+          <a:xfrm>
+            <a:off x="548640" y="1143000"/>
+            <a:ext cx="11064240" cy="5029200"/>
+          </a:xfrm>
+          <a:prstGeom prst="rect">
+            <a:avLst/>
+          </a:prstGeom>
+          <a:solidFill>
+            <a:srgbClr val="F4F4F4"/>
+          </a:solidFill>
+        </p:spPr>
+        <p:txBody>
+          <a:bodyPr wrap="square">
+            <a:noAutofit/>
+          </a:bodyPr>
+          <a:lstStyle/>
+          <a:p>
+            <a:pPr>
+              <a:lnSpc>
+                <a:spcPts val="2200"/>
+              </a:lnSpc>
+              <a:spcAft>
+                <a:spcPts val="400"/>
+              </a:spcAft>
+            </a:pPr>
+            <a:r>
+              <a:rPr sz="2000" b="0">
+                <a:solidFill>
+                  <a:srgbClr val="333333"/>
+                </a:solidFill>
+                <a:latin typeface="Consolas"/>
+              </a:rPr>
+              <a:t>INPUT: float positions, widths, rows Y[], chip W</a:t>
+            </a:r>
+          </a:p>
+          <a:p>
+            <a:pPr>
+              <a:lnSpc>
+                <a:spcPts val="2200"/>
+              </a:lnSpc>
+              <a:spcAft>
+                <a:spcPts val="400"/>
+              </a:spcAft>
+            </a:pPr>
+            <a:r>
+              <a:rPr sz="2000" b="0">
+                <a:solidFill>
+                  <a:srgbClr val="333333"/>
+                </a:solidFill>
+                <a:latin typeface="Consolas"/>
+              </a:rPr>
+              <a:t>OUTPUT: snapped positions (may still overlap)</a:t>
+            </a:r>
+          </a:p>
+          <a:p>
+            <a:pPr>
+              <a:lnSpc>
+                <a:spcPts val="2200"/>
+              </a:lnSpc>
+              <a:spcAft>
+                <a:spcPts val="400"/>
+              </a:spcAft>
+            </a:pPr>
+            <a:r>
+              <a:rPr sz="2000" b="0">
+                <a:solidFill>
+                  <a:srgbClr val="333333"/>
+                </a:solidFill>
+                <a:latin typeface="Consolas"/>
+              </a:rPr>
+              <a:t>for each movable cell c:</a:t>
+            </a:r>
+          </a:p>
+          <a:p>
+            <a:pPr>
+              <a:lnSpc>
+                <a:spcPts val="2200"/>
+              </a:lnSpc>
+              <a:spcAft>
+                <a:spcPts val="400"/>
+              </a:spcAft>
+            </a:pPr>
+            <a:r>
+              <a:rPr sz="2000" b="0">
+                <a:solidFill>
+                  <a:srgbClr val="333333"/>
+                </a:solidFill>
+                <a:latin typeface="Consolas"/>
+              </a:rPr>
+              <a:t>  x ← round(x) clamped to [0, W−w[c]]</a:t>
+            </a:r>
+          </a:p>
+          <a:p>
+            <a:pPr>
+              <a:lnSpc>
+                <a:spcPts val="2200"/>
+              </a:lnSpc>
+              <a:spcAft>
+                <a:spcPts val="400"/>
+              </a:spcAft>
+            </a:pPr>
+            <a:r>
+              <a:rPr sz="2000" b="0">
+                <a:solidFill>
+                  <a:srgbClr val="333333"/>
+                </a:solidFill>
+                <a:latin typeface="Consolas"/>
+              </a:rPr>
+              <a:t>  y ← nearest row in Y[]</a:t>
+            </a:r>
+          </a:p>
+          <a:p>
+            <a:pPr>
+              <a:lnSpc>
+                <a:spcPts val="2200"/>
+              </a:lnSpc>
+              <a:spcAft>
+                <a:spcPts val="400"/>
+              </a:spcAft>
+            </a:pPr>
+            <a:r>
+              <a:rPr sz="2000" b="0">
+                <a:solidFill>
+                  <a:srgbClr val="333333"/>
+                </a:solidFill>
+                <a:latin typeface="Consolas"/>
+              </a:rPr>
+              <a:t>fixed macros: keep locked (x,y)</a:t>
+            </a:r>
+          </a:p>
+          <a:p>
+            <a:pPr>
+              <a:lnSpc>
+                <a:spcPts val="2200"/>
+              </a:lnSpc>
+              <a:spcAft>
+                <a:spcPts val="400"/>
+              </a:spcAft>
+            </a:pPr>
+            <a:r>
+              <a:rPr sz="2000" b="0">
+                <a:solidFill>
+                  <a:srgbClr val="333333"/>
+                </a:solidFill>
+                <a:latin typeface="Consolas"/>
+              </a:rPr>
+              <a:t>NOTE: snap ≠ legal — A,B may share a site</a:t>
+            </a:r>
+          </a:p>
+          <a:p>
+            <a:pPr>
+              <a:lnSpc>
+                <a:spcPts val="2200"/>
+              </a:lnSpc>
+              <a:spcAft>
+                <a:spcPts val="400"/>
+              </a:spcAft>
+            </a:pPr>
+            <a:r>
+              <a:rPr sz="2000" b="0">
+                <a:solidFill>
+                  <a:srgbClr val="333333"/>
+                </a:solidFill>
+                <a:latin typeface="Consolas"/>
+              </a:rPr>
+              <a:t>GOLDEN float: A→(4,2), B→(4,2) still overlap</a:t>
+            </a:r>
+          </a:p>
+        </p:txBody>
+      </p:sp>
+      <p:sp>
+        <p:nvSpPr>
+          <p:cNvPr id="4" name="TextBox 3"/>
+          <p:cNvSpPr txBox="1"/>
+          <p:nvPr/>
+        </p:nvSpPr>
+        <p:spPr>
+          <a:xfrm>
+            <a:off x="548640" y="6355080"/>
+            <a:ext cx="11064240" cy="320040"/>
+          </a:xfrm>
+          <a:prstGeom prst="rect">
+            <a:avLst/>
+          </a:prstGeom>
+          <a:noFill/>
+        </p:spPr>
+        <p:txBody>
+          <a:bodyPr wrap="square">
+            <a:noAutofit/>
+          </a:bodyPr>
+          <a:lstStyle/>
+          <a:p>
+            <a:pPr algn="r">
+              <a:lnSpc>
+                <a:spcPts val="2200"/>
+              </a:lnSpc>
+              <a:defRPr sz="1000" b="0">
+                <a:solidFill>
+                  <a:srgbClr val="666666"/>
+                </a:solidFill>
+                <a:latin typeface="Calibri"/>
+              </a:defRPr>
+            </a:pPr>
+            <a:r>
+              <a:t>learn_legalization — 01 greedy snap</a:t>
+            </a:r>
+          </a:p>
+        </p:txBody>
+      </p:sp>
+    </p:spTree>
+  </p:cSld>
+  <p:clrMapOvr>
+    <a:masterClrMapping/>
+  </p:clrMapOvr>
+</p:sld>
+</file>
+
+<file path=ppt/slides/slide6.xml><?xml version="1.0" encoding="utf-8"?>
 <p:sld xmlns:a="http://schemas.openxmlformats.org/drawingml/2006/main" xmlns:p="http://schemas.openxmlformats.org/presentationml/2006/main" xmlns:r="http://schemas.openxmlformats.org/officeDocument/2006/relationships">
   <p:cSld>
     <p:spTree>
@@ -5030,7 +6379,7 @@
 </p:sld>
 </file>
 
-<file path=ppt/slides/slide4.xml><?xml version="1.0" encoding="utf-8"?>
+<file path=ppt/slides/slide7.xml><?xml version="1.0" encoding="utf-8"?>
 <p:sld xmlns:a="http://schemas.openxmlformats.org/drawingml/2006/main" xmlns:p="http://schemas.openxmlformats.org/presentationml/2006/main" xmlns:r="http://schemas.openxmlformats.org/officeDocument/2006/relationships">
   <p:cSld>
     <p:spTree>
@@ -5189,7 +6538,7 @@
 </p:sld>
 </file>
 
-<file path=ppt/slides/slide5.xml><?xml version="1.0" encoding="utf-8"?>
+<file path=ppt/slides/slide8.xml><?xml version="1.0" encoding="utf-8"?>
 <p:sld xmlns:a="http://schemas.openxmlformats.org/drawingml/2006/main" xmlns:p="http://schemas.openxmlformats.org/presentationml/2006/main" xmlns:r="http://schemas.openxmlformats.org/officeDocument/2006/relationships">
   <p:cSld>
     <p:spTree>
@@ -5348,7 +6697,7 @@
 </p:sld>
 </file>
 
-<file path=ppt/slides/slide6.xml><?xml version="1.0" encoding="utf-8"?>
+<file path=ppt/slides/slide9.xml><?xml version="1.0" encoding="utf-8"?>
 <p:sld xmlns:a="http://schemas.openxmlformats.org/drawingml/2006/main" xmlns:p="http://schemas.openxmlformats.org/presentationml/2006/main" xmlns:r="http://schemas.openxmlformats.org/officeDocument/2006/relationships">
   <p:cSld>
     <p:spTree>
@@ -5463,553 +6812,6 @@
       <p:sp>
         <p:nvSpPr>
           <p:cNvPr id="5" name="TextBox 4"/>
-          <p:cNvSpPr txBox="1"/>
-          <p:nvPr/>
-        </p:nvSpPr>
-        <p:spPr>
-          <a:xfrm>
-            <a:off x="548640" y="6355080"/>
-            <a:ext cx="11064240" cy="320040"/>
-          </a:xfrm>
-          <a:prstGeom prst="rect">
-            <a:avLst/>
-          </a:prstGeom>
-          <a:noFill/>
-        </p:spPr>
-        <p:txBody>
-          <a:bodyPr wrap="square">
-            <a:noAutofit/>
-          </a:bodyPr>
-          <a:lstStyle/>
-          <a:p>
-            <a:pPr algn="r">
-              <a:lnSpc>
-                <a:spcPts val="2200"/>
-              </a:lnSpc>
-              <a:defRPr sz="1000" b="0">
-                <a:solidFill>
-                  <a:srgbClr val="666666"/>
-                </a:solidFill>
-                <a:latin typeface="Calibri"/>
-              </a:defRPr>
-            </a:pPr>
-            <a:r>
-              <a:t>learn_legalization — 01 greedy snap</a:t>
-            </a:r>
-          </a:p>
-        </p:txBody>
-      </p:sp>
-    </p:spTree>
-  </p:cSld>
-  <p:clrMapOvr>
-    <a:masterClrMapping/>
-  </p:clrMapOvr>
-</p:sld>
-</file>
-
-<file path=ppt/slides/slide7.xml><?xml version="1.0" encoding="utf-8"?>
-<p:sld xmlns:a="http://schemas.openxmlformats.org/drawingml/2006/main" xmlns:p="http://schemas.openxmlformats.org/presentationml/2006/main" xmlns:r="http://schemas.openxmlformats.org/officeDocument/2006/relationships">
-  <p:cSld>
-    <p:spTree>
-      <p:nvGrpSpPr>
-        <p:cNvPr id="1" name=""/>
-        <p:cNvGrpSpPr/>
-        <p:nvPr/>
-      </p:nvGrpSpPr>
-      <p:grpSpPr/>
-      <p:sp>
-        <p:nvSpPr>
-          <p:cNvPr id="2" name="TextBox 1"/>
-          <p:cNvSpPr txBox="1"/>
-          <p:nvPr/>
-        </p:nvSpPr>
-        <p:spPr>
-          <a:xfrm>
-            <a:off x="548640" y="411480"/>
-            <a:ext cx="11064240" cy="777240"/>
-          </a:xfrm>
-          <a:prstGeom prst="rect">
-            <a:avLst/>
-          </a:prstGeom>
-          <a:noFill/>
-        </p:spPr>
-        <p:txBody>
-          <a:bodyPr wrap="square">
-            <a:noAutofit/>
-          </a:bodyPr>
-          <a:lstStyle/>
-          <a:p>
-            <a:pPr>
-              <a:lnSpc>
-                <a:spcPts val="2200"/>
-              </a:lnSpc>
-            </a:pPr>
-            <a:r>
-              <a:rPr sz="2800" b="1">
-                <a:solidFill>
-                  <a:srgbClr val="1A1A2E"/>
-                </a:solidFill>
-                <a:latin typeface="Calibri"/>
-              </a:rPr>
-              <a:t>Next: overlap removal / Abacus</a:t>
-            </a:r>
-          </a:p>
-        </p:txBody>
-      </p:sp>
-      <p:pic>
-        <p:nvPicPr>
-          <p:cNvPr id="3" name="Picture 2" descr="05-next-phase.png"/>
-          <p:cNvPicPr>
-            <a:picLocks noChangeAspect="1"/>
-          </p:cNvPicPr>
-          <p:nvPr/>
-        </p:nvPicPr>
-        <p:blipFill>
-          <a:blip r:embed="rId2"/>
-          <a:stretch>
-            <a:fillRect/>
-          </a:stretch>
-        </p:blipFill>
-        <p:spPr>
-          <a:xfrm>
-            <a:off x="548640" y="1143000"/>
-            <a:ext cx="9404113" cy="4572000"/>
-          </a:xfrm>
-          <a:prstGeom prst="rect">
-            <a:avLst/>
-          </a:prstGeom>
-        </p:spPr>
-      </p:pic>
-      <p:sp>
-        <p:nvSpPr>
-          <p:cNvPr id="4" name="TextBox 3"/>
-          <p:cNvSpPr txBox="1"/>
-          <p:nvPr/>
-        </p:nvSpPr>
-        <p:spPr>
-          <a:xfrm>
-            <a:off x="548640" y="5897880"/>
-            <a:ext cx="11064240" cy="411480"/>
-          </a:xfrm>
-          <a:prstGeom prst="rect">
-            <a:avLst/>
-          </a:prstGeom>
-          <a:noFill/>
-        </p:spPr>
-        <p:txBody>
-          <a:bodyPr wrap="square">
-            <a:noAutofit/>
-          </a:bodyPr>
-          <a:lstStyle/>
-          <a:p>
-            <a:pPr>
-              <a:lnSpc>
-                <a:spcPts val="2200"/>
-              </a:lnSpc>
-            </a:pPr>
-            <a:r>
-              <a:rPr sz="1200" b="0">
-                <a:solidFill>
-                  <a:srgbClr val="333333"/>
-                </a:solidFill>
-                <a:latin typeface="Calibri"/>
-              </a:rPr>
-              <a:t>Next: overlap removal / Abacus</a:t>
-            </a:r>
-          </a:p>
-        </p:txBody>
-      </p:sp>
-      <p:sp>
-        <p:nvSpPr>
-          <p:cNvPr id="5" name="TextBox 4"/>
-          <p:cNvSpPr txBox="1"/>
-          <p:nvPr/>
-        </p:nvSpPr>
-        <p:spPr>
-          <a:xfrm>
-            <a:off x="548640" y="6355080"/>
-            <a:ext cx="11064240" cy="320040"/>
-          </a:xfrm>
-          <a:prstGeom prst="rect">
-            <a:avLst/>
-          </a:prstGeom>
-          <a:noFill/>
-        </p:spPr>
-        <p:txBody>
-          <a:bodyPr wrap="square">
-            <a:noAutofit/>
-          </a:bodyPr>
-          <a:lstStyle/>
-          <a:p>
-            <a:pPr algn="r">
-              <a:lnSpc>
-                <a:spcPts val="2200"/>
-              </a:lnSpc>
-              <a:defRPr sz="1000" b="0">
-                <a:solidFill>
-                  <a:srgbClr val="666666"/>
-                </a:solidFill>
-                <a:latin typeface="Calibri"/>
-              </a:defRPr>
-            </a:pPr>
-            <a:r>
-              <a:t>learn_legalization — 01 greedy snap</a:t>
-            </a:r>
-          </a:p>
-        </p:txBody>
-      </p:sp>
-    </p:spTree>
-  </p:cSld>
-  <p:clrMapOvr>
-    <a:masterClrMapping/>
-  </p:clrMapOvr>
-</p:sld>
-</file>
-
-<file path=ppt/slides/slide8.xml><?xml version="1.0" encoding="utf-8"?>
-<p:sld xmlns:a="http://schemas.openxmlformats.org/drawingml/2006/main" xmlns:p="http://schemas.openxmlformats.org/presentationml/2006/main" xmlns:r="http://schemas.openxmlformats.org/officeDocument/2006/relationships">
-  <p:cSld>
-    <p:spTree>
-      <p:nvGrpSpPr>
-        <p:cNvPr id="1" name=""/>
-        <p:cNvGrpSpPr/>
-        <p:nvPr/>
-      </p:nvGrpSpPr>
-      <p:grpSpPr/>
-      <p:sp>
-        <p:nvSpPr>
-          <p:cNvPr id="2" name="TextBox 1"/>
-          <p:cNvSpPr txBox="1"/>
-          <p:nvPr/>
-        </p:nvSpPr>
-        <p:spPr>
-          <a:xfrm>
-            <a:off x="548640" y="411480"/>
-            <a:ext cx="11064240" cy="777240"/>
-          </a:xfrm>
-          <a:prstGeom prst="rect">
-            <a:avLst/>
-          </a:prstGeom>
-          <a:noFill/>
-        </p:spPr>
-        <p:txBody>
-          <a:bodyPr wrap="square">
-            <a:noAutofit/>
-          </a:bodyPr>
-          <a:lstStyle/>
-          <a:p>
-            <a:pPr>
-              <a:lnSpc>
-                <a:spcPts val="2200"/>
-              </a:lnSpc>
-            </a:pPr>
-            <a:r>
-              <a:rPr sz="2800" b="1">
-                <a:solidFill>
-                  <a:srgbClr val="1A1A2E"/>
-                </a:solidFill>
-                <a:latin typeface="Calibri"/>
-              </a:rPr>
-              <a:t>Browser lab track</a:t>
-            </a:r>
-          </a:p>
-        </p:txBody>
-      </p:sp>
-      <p:sp>
-        <p:nvSpPr>
-          <p:cNvPr id="3" name="TextBox 2"/>
-          <p:cNvSpPr txBox="1"/>
-          <p:nvPr/>
-        </p:nvSpPr>
-        <p:spPr>
-          <a:xfrm>
-            <a:off x="548640" y="1234440"/>
-            <a:ext cx="11064240" cy="4937760"/>
-          </a:xfrm>
-          <a:prstGeom prst="rect">
-            <a:avLst/>
-          </a:prstGeom>
-          <a:noFill/>
-        </p:spPr>
-        <p:txBody>
-          <a:bodyPr wrap="square">
-            <a:noAutofit/>
-          </a:bodyPr>
-          <a:lstStyle/>
-          <a:p>
-            <a:pPr lvl="0" marL="457200" indent="-228600">
-              <a:buFont typeface="Calibri"/>
-              <a:spcAft>
-                <a:spcPts val="1000"/>
-              </a:spcAft>
-              <a:buSzPct val="100000"/>
-              <a:buChar char="•"/>
-              <a:lnSpc>
-                <a:spcPts val="2200"/>
-              </a:lnSpc>
-            </a:pPr>
-            <a:r>
-              <a:rPr sz="2000" b="0">
-                <a:solidFill>
-                  <a:srgbClr val="333333"/>
-                </a:solidFill>
-                <a:latin typeface="Calibri"/>
-              </a:rPr>
-              <a:t>In the browser lab track, open the </a:t>
-            </a:r>
-            <a:r>
-              <a:rPr sz="2000" b="1">
-                <a:solidFill>
-                  <a:srgbClr val="333333"/>
-                </a:solidFill>
-                <a:latin typeface="Calibri"/>
-              </a:rPr>
-              <a:t>greedy-snap</a:t>
-            </a:r>
-            <a:r>
-              <a:rPr sz="2000" b="0">
-                <a:solidFill>
-                  <a:srgbClr val="333333"/>
-                </a:solidFill>
-                <a:latin typeface="Calibri"/>
-              </a:rPr>
-              <a:t> lab from the tools shelf</a:t>
-            </a:r>
-          </a:p>
-          <a:p>
-            <a:pPr lvl="0" marL="457200" indent="-228600">
-              <a:buFont typeface="Calibri"/>
-              <a:spcAft>
-                <a:spcPts val="1000"/>
-              </a:spcAft>
-              <a:buSzPct val="100000"/>
-              <a:buChar char="•"/>
-              <a:lnSpc>
-                <a:spcPts val="2200"/>
-              </a:lnSpc>
-            </a:pPr>
-            <a:r>
-              <a:rPr sz="2000" b="0">
-                <a:solidFill>
-                  <a:srgbClr val="333333"/>
-                </a:solidFill>
-                <a:latin typeface="Calibri"/>
-              </a:rPr>
-              <a:t>Load the overlap or float starter, run the legalizer once</a:t>
-            </a:r>
-          </a:p>
-          <a:p>
-            <a:pPr lvl="0" marL="457200" indent="-228600">
-              <a:buFont typeface="Calibri"/>
-              <a:spcAft>
-                <a:spcPts val="1000"/>
-              </a:spcAft>
-              <a:buSzPct val="100000"/>
-              <a:buChar char="•"/>
-              <a:lnSpc>
-                <a:spcPts val="2200"/>
-              </a:lnSpc>
-            </a:pPr>
-            <a:r>
-              <a:rPr sz="2000" b="0">
-                <a:solidFill>
-                  <a:srgbClr val="333333"/>
-                </a:solidFill>
-                <a:latin typeface="Calibri"/>
-              </a:rPr>
-              <a:t>Work the challenges that lock the goldens</a:t>
-            </a:r>
-          </a:p>
-        </p:txBody>
-      </p:sp>
-      <p:sp>
-        <p:nvSpPr>
-          <p:cNvPr id="4" name="TextBox 3"/>
-          <p:cNvSpPr txBox="1"/>
-          <p:nvPr/>
-        </p:nvSpPr>
-        <p:spPr>
-          <a:xfrm>
-            <a:off x="548640" y="6355080"/>
-            <a:ext cx="11064240" cy="320040"/>
-          </a:xfrm>
-          <a:prstGeom prst="rect">
-            <a:avLst/>
-          </a:prstGeom>
-          <a:noFill/>
-        </p:spPr>
-        <p:txBody>
-          <a:bodyPr wrap="square">
-            <a:noAutofit/>
-          </a:bodyPr>
-          <a:lstStyle/>
-          <a:p>
-            <a:pPr algn="r">
-              <a:lnSpc>
-                <a:spcPts val="2200"/>
-              </a:lnSpc>
-              <a:defRPr sz="1000" b="0">
-                <a:solidFill>
-                  <a:srgbClr val="666666"/>
-                </a:solidFill>
-                <a:latin typeface="Calibri"/>
-              </a:defRPr>
-            </a:pPr>
-            <a:r>
-              <a:t>learn_legalization — 01 greedy snap</a:t>
-            </a:r>
-          </a:p>
-        </p:txBody>
-      </p:sp>
-    </p:spTree>
-  </p:cSld>
-  <p:clrMapOvr>
-    <a:masterClrMapping/>
-  </p:clrMapOvr>
-</p:sld>
-</file>
-
-<file path=ppt/slides/slide9.xml><?xml version="1.0" encoding="utf-8"?>
-<p:sld xmlns:a="http://schemas.openxmlformats.org/drawingml/2006/main" xmlns:p="http://schemas.openxmlformats.org/presentationml/2006/main" xmlns:r="http://schemas.openxmlformats.org/officeDocument/2006/relationships">
-  <p:cSld>
-    <p:spTree>
-      <p:nvGrpSpPr>
-        <p:cNvPr id="1" name=""/>
-        <p:cNvGrpSpPr/>
-        <p:nvPr/>
-      </p:nvGrpSpPr>
-      <p:grpSpPr/>
-      <p:sp>
-        <p:nvSpPr>
-          <p:cNvPr id="2" name="TextBox 1"/>
-          <p:cNvSpPr txBox="1"/>
-          <p:nvPr/>
-        </p:nvSpPr>
-        <p:spPr>
-          <a:xfrm>
-            <a:off x="548640" y="411480"/>
-            <a:ext cx="11064240" cy="777240"/>
-          </a:xfrm>
-          <a:prstGeom prst="rect">
-            <a:avLst/>
-          </a:prstGeom>
-          <a:noFill/>
-        </p:spPr>
-        <p:txBody>
-          <a:bodyPr wrap="square">
-            <a:noAutofit/>
-          </a:bodyPr>
-          <a:lstStyle/>
-          <a:p>
-            <a:pPr>
-              <a:lnSpc>
-                <a:spcPts val="2200"/>
-              </a:lnSpc>
-            </a:pPr>
-            <a:r>
-              <a:rPr sz="2800" b="1">
-                <a:solidFill>
-                  <a:srgbClr val="1A1A2E"/>
-                </a:solidFill>
-                <a:latin typeface="Calibri"/>
-              </a:rPr>
-              <a:t>Implement track</a:t>
-            </a:r>
-          </a:p>
-        </p:txBody>
-      </p:sp>
-      <p:sp>
-        <p:nvSpPr>
-          <p:cNvPr id="3" name="TextBox 2"/>
-          <p:cNvSpPr txBox="1"/>
-          <p:nvPr/>
-        </p:nvSpPr>
-        <p:spPr>
-          <a:xfrm>
-            <a:off x="548640" y="1234440"/>
-            <a:ext cx="11064240" cy="4937760"/>
-          </a:xfrm>
-          <a:prstGeom prst="rect">
-            <a:avLst/>
-          </a:prstGeom>
-          <a:noFill/>
-        </p:spPr>
-        <p:txBody>
-          <a:bodyPr wrap="square">
-            <a:noAutofit/>
-          </a:bodyPr>
-          <a:lstStyle/>
-          <a:p>
-            <a:pPr lvl="0" marL="457200" indent="-228600">
-              <a:buFont typeface="Calibri"/>
-              <a:spcAft>
-                <a:spcPts val="1000"/>
-              </a:spcAft>
-              <a:buSzPct val="100000"/>
-              <a:buChar char="•"/>
-              <a:lnSpc>
-                <a:spcPts val="2200"/>
-              </a:lnSpc>
-            </a:pPr>
-            <a:r>
-              <a:rPr sz="2000" b="0">
-                <a:solidFill>
-                  <a:srgbClr val="333333"/>
-                </a:solidFill>
-                <a:latin typeface="Calibri"/>
-              </a:rPr>
-              <a:t>In the implement track, open this module's examples and the course `common/` solvers</a:t>
-            </a:r>
-          </a:p>
-          <a:p>
-            <a:pPr lvl="0" marL="457200" indent="-228600">
-              <a:buFont typeface="Calibri"/>
-              <a:spcAft>
-                <a:spcPts val="1000"/>
-              </a:spcAft>
-              <a:buSzPct val="100000"/>
-              <a:buChar char="•"/>
-              <a:lnSpc>
-                <a:spcPts val="2200"/>
-              </a:lnSpc>
-            </a:pPr>
-            <a:r>
-              <a:rPr sz="2000" b="0">
-                <a:solidFill>
-                  <a:srgbClr val="333333"/>
-                </a:solidFill>
-                <a:latin typeface="Calibri"/>
-              </a:rPr>
-              <a:t>Parse `tiny_legal.json`, run the algorithm with deterministic coordinates</a:t>
-            </a:r>
-          </a:p>
-          <a:p>
-            <a:pPr lvl="0" marL="457200" indent="-228600">
-              <a:buFont typeface="Calibri"/>
-              <a:spcAft>
-                <a:spcPts val="1000"/>
-              </a:spcAft>
-              <a:buSzPct val="100000"/>
-              <a:buChar char="•"/>
-              <a:lnSpc>
-                <a:spcPts val="2200"/>
-              </a:lnSpc>
-            </a:pPr>
-            <a:r>
-              <a:rPr sz="2000" b="0">
-                <a:solidFill>
-                  <a:srgbClr val="333333"/>
-                </a:solidFill>
-                <a:latin typeface="Calibri"/>
-              </a:rPr>
-              <a:t>Match the browser goldens before you claim the checklist</a:t>
-            </a:r>
-          </a:p>
-        </p:txBody>
-      </p:sp>
-      <p:sp>
-        <p:nvSpPr>
-          <p:cNvPr id="4" name="TextBox 3"/>
           <p:cNvSpPr txBox="1"/>
           <p:nvPr/>
         </p:nvSpPr>
